--- a/slides/ch02-planning-business-messages.pptx
+++ b/slides/ch02-planning-business-messages.pptx
@@ -6104,7 +6104,7 @@
                 </a:solidFill>
                 <a:latin typeface="Calibri"/>
               </a:rPr>
-              <a:t>BADM 225 · Chapter 2</a:t>
+              <a:t>BADM 225 · Chapter 2  ·  © Derek D. Bussan</a:t>
             </a:r>
           </a:p>
         </p:txBody>
@@ -6232,7 +6232,7 @@
                 </a:solidFill>
                 <a:latin typeface="Calibri"/>
               </a:rPr>
-              <a:t>BADM 225 · Chapter 2</a:t>
+              <a:t>BADM 225 · Chapter 2  ·  © Derek D. Bussan</a:t>
             </a:r>
           </a:p>
         </p:txBody>
@@ -6792,7 +6792,7 @@
                 </a:solidFill>
                 <a:latin typeface="Calibri"/>
               </a:rPr>
-              <a:t>BADM 225 · Chapter 2</a:t>
+              <a:t>BADM 225 · Chapter 2  ·  © Derek D. Bussan</a:t>
             </a:r>
           </a:p>
         </p:txBody>
@@ -7118,7 +7118,7 @@
                 </a:solidFill>
                 <a:latin typeface="Calibri"/>
               </a:rPr>
-              <a:t>BADM 225 · Chapter 2</a:t>
+              <a:t>BADM 225 · Chapter 2  ·  © Derek D. Bussan</a:t>
             </a:r>
           </a:p>
         </p:txBody>
@@ -7570,7 +7570,7 @@
                 </a:solidFill>
                 <a:latin typeface="Calibri"/>
               </a:rPr>
-              <a:t>BADM 225 · Chapter 2</a:t>
+              <a:t>BADM 225 · Chapter 2  ·  © Derek D. Bussan</a:t>
             </a:r>
           </a:p>
         </p:txBody>
@@ -7935,7 +7935,7 @@
                 </a:solidFill>
                 <a:latin typeface="Calibri"/>
               </a:rPr>
-              <a:t>BADM 225 · Chapter 2</a:t>
+              <a:t>BADM 225 · Chapter 2  ·  © Derek D. Bussan</a:t>
             </a:r>
           </a:p>
         </p:txBody>
@@ -8063,7 +8063,7 @@
                 </a:solidFill>
                 <a:latin typeface="Calibri"/>
               </a:rPr>
-              <a:t>BADM 225 · Chapter 2</a:t>
+              <a:t>BADM 225 · Chapter 2  ·  © Derek D. Bussan</a:t>
             </a:r>
           </a:p>
         </p:txBody>
@@ -8455,7 +8455,7 @@
                 </a:solidFill>
                 <a:latin typeface="Calibri"/>
               </a:rPr>
-              <a:t>BADM 225 · Chapter 2</a:t>
+              <a:t>BADM 225 · Chapter 2  ·  © Derek D. Bussan</a:t>
             </a:r>
           </a:p>
         </p:txBody>
@@ -8742,7 +8742,7 @@
                 </a:solidFill>
                 <a:latin typeface="Calibri"/>
               </a:rPr>
-              <a:t>BADM 225 · Chapter 2</a:t>
+              <a:t>BADM 225 · Chapter 2  ·  © Derek D. Bussan</a:t>
             </a:r>
           </a:p>
         </p:txBody>
@@ -9290,7 +9290,7 @@
                 </a:solidFill>
                 <a:latin typeface="Calibri"/>
               </a:rPr>
-              <a:t>BADM 225 · Chapter 2</a:t>
+              <a:t>BADM 225 · Chapter 2  ·  © Derek D. Bussan</a:t>
             </a:r>
           </a:p>
         </p:txBody>
@@ -9418,7 +9418,7 @@
                 </a:solidFill>
                 <a:latin typeface="Calibri"/>
               </a:rPr>
-              <a:t>BADM 225 · Chapter 2</a:t>
+              <a:t>BADM 225 · Chapter 2  ·  © Derek D. Bussan</a:t>
             </a:r>
           </a:p>
         </p:txBody>
@@ -9739,7 +9739,7 @@
                 </a:solidFill>
                 <a:latin typeface="Calibri"/>
               </a:rPr>
-              <a:t>BADM 225 · Chapter 2</a:t>
+              <a:t>BADM 225 · Chapter 2  ·  © Derek D. Bussan</a:t>
             </a:r>
           </a:p>
         </p:txBody>
@@ -10299,7 +10299,7 @@
                 </a:solidFill>
                 <a:latin typeface="Calibri"/>
               </a:rPr>
-              <a:t>BADM 225 · Chapter 2</a:t>
+              <a:t>BADM 225 · Chapter 2  ·  © Derek D. Bussan</a:t>
             </a:r>
           </a:p>
         </p:txBody>
@@ -10698,7 +10698,7 @@
                 </a:solidFill>
                 <a:latin typeface="Calibri"/>
               </a:rPr>
-              <a:t>BADM 225 · Chapter 2</a:t>
+              <a:t>BADM 225 · Chapter 2  ·  © Derek D. Bussan</a:t>
             </a:r>
           </a:p>
         </p:txBody>
@@ -10826,7 +10826,7 @@
                 </a:solidFill>
                 <a:latin typeface="Calibri"/>
               </a:rPr>
-              <a:t>BADM 225 · Chapter 2</a:t>
+              <a:t>BADM 225 · Chapter 2  ·  © Derek D. Bussan</a:t>
             </a:r>
           </a:p>
         </p:txBody>
@@ -11388,7 +11388,7 @@
                 </a:solidFill>
                 <a:latin typeface="Calibri"/>
               </a:rPr>
-              <a:t>BADM 225 · Chapter 2</a:t>
+              <a:t>BADM 225 · Chapter 2  ·  © Derek D. Bussan</a:t>
             </a:r>
           </a:p>
         </p:txBody>
@@ -11879,7 +11879,7 @@
                 </a:solidFill>
                 <a:latin typeface="Calibri"/>
               </a:rPr>
-              <a:t>BADM 225 · Chapter 2</a:t>
+              <a:t>BADM 225 · Chapter 2  ·  © Derek D. Bussan</a:t>
             </a:r>
           </a:p>
         </p:txBody>
@@ -12547,7 +12547,7 @@
                 </a:solidFill>
                 <a:latin typeface="Calibri"/>
               </a:rPr>
-              <a:t>BADM 225 · Chapter 2</a:t>
+              <a:t>BADM 225 · Chapter 2  ·  © Derek D. Bussan</a:t>
             </a:r>
           </a:p>
         </p:txBody>
@@ -13215,7 +13215,7 @@
                 </a:solidFill>
                 <a:latin typeface="Calibri"/>
               </a:rPr>
-              <a:t>BADM 225 · Chapter 2</a:t>
+              <a:t>BADM 225 · Chapter 2  ·  © Derek D. Bussan</a:t>
             </a:r>
           </a:p>
         </p:txBody>
@@ -13502,7 +13502,7 @@
                 </a:solidFill>
                 <a:latin typeface="Calibri"/>
               </a:rPr>
-              <a:t>BADM 225 · Chapter 2</a:t>
+              <a:t>BADM 225 · Chapter 2  ·  © Derek D. Bussan</a:t>
             </a:r>
           </a:p>
         </p:txBody>
@@ -13962,7 +13962,7 @@
                 </a:solidFill>
                 <a:latin typeface="Calibri"/>
               </a:rPr>
-              <a:t>BADM 225 · Chapter 2</a:t>
+              <a:t>BADM 225 · Chapter 2  ·  © Derek D. Bussan</a:t>
             </a:r>
           </a:p>
         </p:txBody>
@@ -14249,7 +14249,7 @@
                 </a:solidFill>
                 <a:latin typeface="Calibri"/>
               </a:rPr>
-              <a:t>BADM 225 · Chapter 2</a:t>
+              <a:t>BADM 225 · Chapter 2  ·  © Derek D. Bussan</a:t>
             </a:r>
           </a:p>
         </p:txBody>
@@ -14575,7 +14575,7 @@
                 </a:solidFill>
                 <a:latin typeface="Calibri"/>
               </a:rPr>
-              <a:t>BADM 225 · Chapter 2</a:t>
+              <a:t>BADM 225 · Chapter 2  ·  © Derek D. Bussan</a:t>
             </a:r>
           </a:p>
         </p:txBody>
@@ -15390,7 +15390,7 @@
                 </a:solidFill>
                 <a:latin typeface="Calibri"/>
               </a:rPr>
-              <a:t>BADM 225 · Chapter 2</a:t>
+              <a:t>BADM 225 · Chapter 2  ·  © Derek D. Bussan</a:t>
             </a:r>
           </a:p>
         </p:txBody>
@@ -15666,7 +15666,7 @@
                 </a:solidFill>
                 <a:latin typeface="Calibri"/>
               </a:rPr>
-              <a:t>BADM 225 · Chapter 2</a:t>
+              <a:t>BADM 225 · Chapter 2  ·  © Derek D. Bussan</a:t>
             </a:r>
           </a:p>
         </p:txBody>
@@ -15759,7 +15759,7 @@
                 </a:solidFill>
                 <a:latin typeface="Calibri"/>
               </a:rPr>
-              <a:t>BADM 225 · Chapter 2</a:t>
+              <a:t>BADM 225 · Chapter 2  ·  © Derek D. Bussan</a:t>
             </a:r>
           </a:p>
         </p:txBody>
@@ -16158,7 +16158,7 @@
                 </a:solidFill>
                 <a:latin typeface="Calibri"/>
               </a:rPr>
-              <a:t>BADM 225 · Chapter 2</a:t>
+              <a:t>BADM 225 · Chapter 2  ·  © Derek D. Bussan</a:t>
             </a:r>
           </a:p>
         </p:txBody>
@@ -16286,7 +16286,7 @@
                 </a:solidFill>
                 <a:latin typeface="Calibri"/>
               </a:rPr>
-              <a:t>BADM 225 · Chapter 2</a:t>
+              <a:t>BADM 225 · Chapter 2  ·  © Derek D. Bussan</a:t>
             </a:r>
           </a:p>
         </p:txBody>
@@ -16834,7 +16834,7 @@
                 </a:solidFill>
                 <a:latin typeface="Calibri"/>
               </a:rPr>
-              <a:t>BADM 225 · Chapter 2</a:t>
+              <a:t>BADM 225 · Chapter 2  ·  © Derek D. Bussan</a:t>
             </a:r>
           </a:p>
         </p:txBody>
@@ -16962,7 +16962,7 @@
                 </a:solidFill>
                 <a:latin typeface="Calibri"/>
               </a:rPr>
-              <a:t>BADM 225 · Chapter 2</a:t>
+              <a:t>BADM 225 · Chapter 2  ·  © Derek D. Bussan</a:t>
             </a:r>
           </a:p>
         </p:txBody>
@@ -17432,7 +17432,7 @@
                 </a:solidFill>
                 <a:latin typeface="Calibri"/>
               </a:rPr>
-              <a:t>BADM 225 · Chapter 2</a:t>
+              <a:t>BADM 225 · Chapter 2  ·  © Derek D. Bussan</a:t>
             </a:r>
           </a:p>
         </p:txBody>
@@ -17833,7 +17833,7 @@
                 </a:solidFill>
                 <a:latin typeface="Calibri"/>
               </a:rPr>
-              <a:t>BADM 225 · Chapter 2</a:t>
+              <a:t>BADM 225 · Chapter 2  ·  © Derek D. Bussan</a:t>
             </a:r>
           </a:p>
         </p:txBody>

--- a/slides/ch02-planning-business-messages.pptx
+++ b/slides/ch02-planning-business-messages.pptx
@@ -5933,7 +5933,7 @@
                 </a:solidFill>
                 <a:latin typeface="Calibri"/>
               </a:rPr>
-              <a:t>BADM 225 · Chapter 2  ·  Original instructional material — no publisher content</a:t>
+              <a:t>BADM 225 · Chapter 2  ·  Original material © 2026 Derek D. Bussan, PhD, MBA  ·  No publisher content</a:t>
             </a:r>
           </a:p>
         </p:txBody>
